--- a/Planning docs/Slides/lesson-2-4-teacher-slides.pptx
+++ b/Planning docs/Slides/lesson-2-4-teacher-slides.pptx
@@ -4519,7 +4519,7 @@
                 <a:ea typeface="Calibri" pitchFamily="34" charset="-122"/>
                 <a:cs typeface="Calibri" pitchFamily="34" charset="-120"/>
               </a:rPr>
-              <a:t>•  Think about everything that has happened to Stanley so far. Is being flat mostly good or mostly bad for him? Explain.</a:t>
+              <a:t>•  Stop when Stanley is mailed from the box on the corner. The setting is about to change from the Lambchops’ home to California. Which characters get left behind — and what do you think that does to the story?</a:t>
             </a:r>
             <a:endParaRPr lang="en-US" sz="1500" dirty="0"/>
           </a:p>
@@ -5995,7 +5995,7 @@
                 <a:ea typeface="Calibri" pitchFamily="34" charset="-122"/>
                 <a:cs typeface="Calibri" pitchFamily="34" charset="-120"/>
               </a:rPr>
-              <a:t>Think about everything that has happened to Stanley so far. Is being flat mostly good or mostly bad for him? Explain.</a:t>
+              <a:t>Stop when Stanley is mailed from the box on the corner. The setting is about to change from the Lambchops’ home to California. Which characters get left behind — and what do you think that does to the story?</a:t>
             </a:r>
             <a:endParaRPr lang="en-US" sz="1700" dirty="0"/>
           </a:p>
